--- a/lectures/Binary_Search_Trees.pptx
+++ b/lectures/Binary_Search_Trees.pptx
@@ -3810,7 +3810,7 @@
                 <a:ea typeface="Calibri" pitchFamily="34" charset="-122"/>
                 <a:cs typeface="Calibri" pitchFamily="34" charset="-120"/>
               </a:rPr>
-              <a:t>Week 5  ·  Session 14  ·  October 2</a:t>
+              <a:t>Week 6  ·  Session 15  ·  October 5</a:t>
             </a:r>
             <a:endParaRPr lang="en-US" sz="1100" dirty="0"/>
           </a:p>
